--- a/backend/tests/fixtures/lumen_justify_pitch_deck.pptx
+++ b/backend/tests/fixtures/lumen_justify_pitch_deck.pptx
@@ -3108,7 +3108,7 @@
             <a:avLst/>
           </a:prstGeom>
           <a:solidFill>
-            <a:srgbClr val="0E0E0C"/>
+            <a:srgbClr val="FAF7F2"/>
           </a:solidFill>
           <a:ln>
             <a:noFill/>
@@ -3161,7 +3161,7 @@
             <a:r>
               <a:rPr sz="1100" b="0" i="0">
                 <a:solidFill>
-                  <a:srgbClr val="C9694E"/>
+                  <a:srgbClr val="2F4A3F"/>
                 </a:solidFill>
                 <a:latin typeface="Courier New"/>
               </a:rPr>
@@ -3195,7 +3195,7 @@
             <a:r>
               <a:rPr sz="5600" b="1" i="0">
                 <a:solidFill>
-                  <a:srgbClr val="ECEBE4"/>
+                  <a:srgbClr val="1C1F1A"/>
                 </a:solidFill>
                 <a:latin typeface="Calibri"/>
               </a:rPr>
@@ -3221,7 +3221,7 @@
           </a:prstGeom>
           <a:ln w="12700">
             <a:solidFill>
-              <a:srgbClr val="A68A5B"/>
+              <a:srgbClr val="A08863"/>
             </a:solidFill>
           </a:ln>
         </p:spPr>
@@ -3265,7 +3265,7 @@
             <a:r>
               <a:rPr sz="2000" b="0" i="0">
                 <a:solidFill>
-                  <a:srgbClr val="ECEBE4"/>
+                  <a:srgbClr val="1C1F1A"/>
                 </a:solidFill>
                 <a:latin typeface="Calibri"/>
               </a:rPr>
@@ -3302,7 +3302,7 @@
             <a:r>
               <a:rPr sz="1000" b="0" i="0">
                 <a:solidFill>
-                  <a:srgbClr val="75716A"/>
+                  <a:srgbClr val="7F837D"/>
                 </a:solidFill>
                 <a:latin typeface="Courier New"/>
               </a:rPr>
@@ -3344,7 +3344,7 @@
             <a:avLst/>
           </a:prstGeom>
           <a:solidFill>
-            <a:srgbClr val="0E0E0C"/>
+            <a:srgbClr val="FAF7F2"/>
           </a:solidFill>
           <a:ln>
             <a:noFill/>
@@ -3397,7 +3397,7 @@
             <a:r>
               <a:rPr sz="1000" b="0" i="0">
                 <a:solidFill>
-                  <a:srgbClr val="C9694E"/>
+                  <a:srgbClr val="2F4A3F"/>
                 </a:solidFill>
                 <a:latin typeface="Courier New"/>
               </a:rPr>
@@ -3431,7 +3431,7 @@
             <a:r>
               <a:rPr sz="3600" b="1" i="0">
                 <a:solidFill>
-                  <a:srgbClr val="ECEBE4"/>
+                  <a:srgbClr val="1C1F1A"/>
                 </a:solidFill>
                 <a:latin typeface="Calibri"/>
               </a:rPr>
@@ -3456,7 +3456,7 @@
           </a:prstGeom>
           <a:ln w="12700">
             <a:solidFill>
-              <a:srgbClr val="A68A5B"/>
+              <a:srgbClr val="A08863"/>
             </a:solidFill>
           </a:ln>
         </p:spPr>
@@ -3500,7 +3500,7 @@
             <a:r>
               <a:rPr sz="1800" b="0" i="0">
                 <a:solidFill>
-                  <a:srgbClr val="ECEBE4"/>
+                  <a:srgbClr val="1C1F1A"/>
                 </a:solidFill>
                 <a:latin typeface="Calibri"/>
               </a:rPr>
@@ -3542,7 +3542,7 @@
             <a:avLst/>
           </a:prstGeom>
           <a:solidFill>
-            <a:srgbClr val="0E0E0C"/>
+            <a:srgbClr val="FAF7F2"/>
           </a:solidFill>
           <a:ln>
             <a:noFill/>
@@ -3595,7 +3595,7 @@
             <a:r>
               <a:rPr sz="1000" b="0" i="0">
                 <a:solidFill>
-                  <a:srgbClr val="C9694E"/>
+                  <a:srgbClr val="2F4A3F"/>
                 </a:solidFill>
                 <a:latin typeface="Courier New"/>
               </a:rPr>
@@ -3629,7 +3629,7 @@
             <a:r>
               <a:rPr sz="3600" b="1" i="0">
                 <a:solidFill>
-                  <a:srgbClr val="ECEBE4"/>
+                  <a:srgbClr val="1C1F1A"/>
                 </a:solidFill>
                 <a:latin typeface="Calibri"/>
               </a:rPr>
@@ -3654,7 +3654,7 @@
           </a:prstGeom>
           <a:ln w="12700">
             <a:solidFill>
-              <a:srgbClr val="A68A5B"/>
+              <a:srgbClr val="A08863"/>
             </a:solidFill>
           </a:ln>
         </p:spPr>
@@ -3690,11 +3690,11 @@
             </a:avLst>
           </a:prstGeom>
           <a:solidFill>
-            <a:srgbClr val="181816"/>
+            <a:srgbClr val="E8E3D8"/>
           </a:solidFill>
           <a:ln w="6350">
             <a:solidFill>
-              <a:srgbClr val="75716A"/>
+              <a:srgbClr val="7F837D"/>
             </a:solidFill>
           </a:ln>
         </p:spPr>
@@ -3745,7 +3745,7 @@
             <a:r>
               <a:rPr sz="1000" b="0" i="0">
                 <a:solidFill>
-                  <a:srgbClr val="A7A398"/>
+                  <a:srgbClr val="C6C1B4"/>
                 </a:solidFill>
                 <a:latin typeface="Courier New"/>
               </a:rPr>
@@ -3779,7 +3779,7 @@
             <a:r>
               <a:rPr sz="3800" b="1" i="0">
                 <a:solidFill>
-                  <a:srgbClr val="ECEBE4"/>
+                  <a:srgbClr val="1C1F1A"/>
                 </a:solidFill>
                 <a:latin typeface="Calibri"/>
               </a:rPr>
@@ -3805,11 +3805,11 @@
             </a:avLst>
           </a:prstGeom>
           <a:solidFill>
-            <a:srgbClr val="181816"/>
+            <a:srgbClr val="E8E3D8"/>
           </a:solidFill>
           <a:ln w="6350">
             <a:solidFill>
-              <a:srgbClr val="75716A"/>
+              <a:srgbClr val="7F837D"/>
             </a:solidFill>
           </a:ln>
         </p:spPr>
@@ -3860,7 +3860,7 @@
             <a:r>
               <a:rPr sz="1000" b="0" i="0">
                 <a:solidFill>
-                  <a:srgbClr val="A7A398"/>
+                  <a:srgbClr val="C6C1B4"/>
                 </a:solidFill>
                 <a:latin typeface="Courier New"/>
               </a:rPr>
@@ -3894,7 +3894,7 @@
             <a:r>
               <a:rPr sz="3800" b="1" i="0">
                 <a:solidFill>
-                  <a:srgbClr val="ECEBE4"/>
+                  <a:srgbClr val="1C1F1A"/>
                 </a:solidFill>
                 <a:latin typeface="Calibri"/>
               </a:rPr>
@@ -3920,11 +3920,11 @@
             </a:avLst>
           </a:prstGeom>
           <a:solidFill>
-            <a:srgbClr val="181816"/>
+            <a:srgbClr val="E8E3D8"/>
           </a:solidFill>
           <a:ln w="6350">
             <a:solidFill>
-              <a:srgbClr val="75716A"/>
+              <a:srgbClr val="7F837D"/>
             </a:solidFill>
           </a:ln>
         </p:spPr>
@@ -3975,7 +3975,7 @@
             <a:r>
               <a:rPr sz="1000" b="0" i="0">
                 <a:solidFill>
-                  <a:srgbClr val="A7A398"/>
+                  <a:srgbClr val="C6C1B4"/>
                 </a:solidFill>
                 <a:latin typeface="Courier New"/>
               </a:rPr>
@@ -4009,7 +4009,7 @@
             <a:r>
               <a:rPr sz="3800" b="1" i="0">
                 <a:solidFill>
-                  <a:srgbClr val="ECEBE4"/>
+                  <a:srgbClr val="1C1F1A"/>
                 </a:solidFill>
                 <a:latin typeface="Calibri"/>
               </a:rPr>
@@ -4035,11 +4035,11 @@
             </a:avLst>
           </a:prstGeom>
           <a:solidFill>
-            <a:srgbClr val="181816"/>
+            <a:srgbClr val="E8E3D8"/>
           </a:solidFill>
           <a:ln w="6350">
             <a:solidFill>
-              <a:srgbClr val="75716A"/>
+              <a:srgbClr val="7F837D"/>
             </a:solidFill>
           </a:ln>
         </p:spPr>
@@ -4090,7 +4090,7 @@
             <a:r>
               <a:rPr sz="1000" b="0" i="0">
                 <a:solidFill>
-                  <a:srgbClr val="A7A398"/>
+                  <a:srgbClr val="C6C1B4"/>
                 </a:solidFill>
                 <a:latin typeface="Courier New"/>
               </a:rPr>
@@ -4124,7 +4124,7 @@
             <a:r>
               <a:rPr sz="3800" b="1" i="0">
                 <a:solidFill>
-                  <a:srgbClr val="ECEBE4"/>
+                  <a:srgbClr val="1C1F1A"/>
                 </a:solidFill>
                 <a:latin typeface="Calibri"/>
               </a:rPr>
@@ -4150,11 +4150,11 @@
             </a:avLst>
           </a:prstGeom>
           <a:solidFill>
-            <a:srgbClr val="181816"/>
+            <a:srgbClr val="E8E3D8"/>
           </a:solidFill>
           <a:ln w="6350">
             <a:solidFill>
-              <a:srgbClr val="75716A"/>
+              <a:srgbClr val="7F837D"/>
             </a:solidFill>
           </a:ln>
         </p:spPr>
@@ -4205,7 +4205,7 @@
             <a:r>
               <a:rPr sz="1000" b="0" i="0">
                 <a:solidFill>
-                  <a:srgbClr val="A7A398"/>
+                  <a:srgbClr val="C6C1B4"/>
                 </a:solidFill>
                 <a:latin typeface="Courier New"/>
               </a:rPr>
@@ -4239,7 +4239,7 @@
             <a:r>
               <a:rPr sz="3800" b="1" i="0">
                 <a:solidFill>
-                  <a:srgbClr val="ECEBE4"/>
+                  <a:srgbClr val="1C1F1A"/>
                 </a:solidFill>
                 <a:latin typeface="Calibri"/>
               </a:rPr>
@@ -4265,11 +4265,11 @@
             </a:avLst>
           </a:prstGeom>
           <a:solidFill>
-            <a:srgbClr val="181816"/>
+            <a:srgbClr val="E8E3D8"/>
           </a:solidFill>
           <a:ln w="6350">
             <a:solidFill>
-              <a:srgbClr val="75716A"/>
+              <a:srgbClr val="7F837D"/>
             </a:solidFill>
           </a:ln>
         </p:spPr>
@@ -4320,7 +4320,7 @@
             <a:r>
               <a:rPr sz="1000" b="0" i="0">
                 <a:solidFill>
-                  <a:srgbClr val="A7A398"/>
+                  <a:srgbClr val="C6C1B4"/>
                 </a:solidFill>
                 <a:latin typeface="Courier New"/>
               </a:rPr>
@@ -4354,7 +4354,7 @@
             <a:r>
               <a:rPr sz="3800" b="1" i="0">
                 <a:solidFill>
-                  <a:srgbClr val="ECEBE4"/>
+                  <a:srgbClr val="1C1F1A"/>
                 </a:solidFill>
                 <a:latin typeface="Calibri"/>
               </a:rPr>
@@ -4396,7 +4396,7 @@
             <a:avLst/>
           </a:prstGeom>
           <a:solidFill>
-            <a:srgbClr val="0E0E0C"/>
+            <a:srgbClr val="FAF7F2"/>
           </a:solidFill>
           <a:ln>
             <a:noFill/>
@@ -4449,7 +4449,7 @@
             <a:r>
               <a:rPr sz="1000" b="0" i="0">
                 <a:solidFill>
-                  <a:srgbClr val="C9694E"/>
+                  <a:srgbClr val="2F4A3F"/>
                 </a:solidFill>
                 <a:latin typeface="Courier New"/>
               </a:rPr>
@@ -4483,7 +4483,7 @@
             <a:r>
               <a:rPr sz="3600" b="1" i="0">
                 <a:solidFill>
-                  <a:srgbClr val="ECEBE4"/>
+                  <a:srgbClr val="1C1F1A"/>
                 </a:solidFill>
                 <a:latin typeface="Calibri"/>
               </a:rPr>
@@ -4508,7 +4508,7 @@
           </a:prstGeom>
           <a:ln w="12700">
             <a:solidFill>
-              <a:srgbClr val="A68A5B"/>
+              <a:srgbClr val="A08863"/>
             </a:solidFill>
           </a:ln>
         </p:spPr>
@@ -4552,7 +4552,7 @@
             <a:r>
               <a:rPr sz="1500" b="0" i="0">
                 <a:solidFill>
-                  <a:srgbClr val="ECEBE4"/>
+                  <a:srgbClr val="1C1F1A"/>
                 </a:solidFill>
                 <a:latin typeface="Calibri"/>
               </a:rPr>
@@ -4593,7 +4593,7 @@
             <a:r>
               <a:rPr sz="900" b="0" i="0">
                 <a:solidFill>
-                  <a:srgbClr val="A7A398"/>
+                  <a:srgbClr val="C6C1B4"/>
                 </a:solidFill>
                 <a:latin typeface="Courier New"/>
               </a:rPr>
@@ -4635,7 +4635,7 @@
             <a:avLst/>
           </a:prstGeom>
           <a:solidFill>
-            <a:srgbClr val="0E0E0C"/>
+            <a:srgbClr val="FAF7F2"/>
           </a:solidFill>
           <a:ln>
             <a:noFill/>
@@ -4688,7 +4688,7 @@
             <a:r>
               <a:rPr sz="1000" b="0" i="0">
                 <a:solidFill>
-                  <a:srgbClr val="C9694E"/>
+                  <a:srgbClr val="2F4A3F"/>
                 </a:solidFill>
                 <a:latin typeface="Courier New"/>
               </a:rPr>
@@ -4722,7 +4722,7 @@
             <a:r>
               <a:rPr sz="3600" b="1" i="0">
                 <a:solidFill>
-                  <a:srgbClr val="ECEBE4"/>
+                  <a:srgbClr val="1C1F1A"/>
                 </a:solidFill>
                 <a:latin typeface="Calibri"/>
               </a:rPr>
@@ -4747,7 +4747,7 @@
           </a:prstGeom>
           <a:ln w="12700">
             <a:solidFill>
-              <a:srgbClr val="A68A5B"/>
+              <a:srgbClr val="A08863"/>
             </a:solidFill>
           </a:ln>
         </p:spPr>
@@ -4791,7 +4791,7 @@
             <a:r>
               <a:rPr sz="1500" b="0" i="0">
                 <a:solidFill>
-                  <a:srgbClr val="ECEBE4"/>
+                  <a:srgbClr val="1C1F1A"/>
                 </a:solidFill>
                 <a:latin typeface="Calibri"/>
               </a:rPr>
@@ -4838,7 +4838,7 @@
             <a:r>
               <a:rPr sz="900" b="0" i="0">
                 <a:solidFill>
-                  <a:srgbClr val="A7A398"/>
+                  <a:srgbClr val="C6C1B4"/>
                 </a:solidFill>
                 <a:latin typeface="Courier New"/>
               </a:rPr>
@@ -4880,7 +4880,7 @@
             <a:avLst/>
           </a:prstGeom>
           <a:solidFill>
-            <a:srgbClr val="0E0E0C"/>
+            <a:srgbClr val="FAF7F2"/>
           </a:solidFill>
           <a:ln>
             <a:noFill/>
@@ -4933,7 +4933,7 @@
             <a:r>
               <a:rPr sz="1000" b="0" i="0">
                 <a:solidFill>
-                  <a:srgbClr val="C9694E"/>
+                  <a:srgbClr val="2F4A3F"/>
                 </a:solidFill>
                 <a:latin typeface="Courier New"/>
               </a:rPr>
@@ -4967,7 +4967,7 @@
             <a:r>
               <a:rPr sz="3600" b="1" i="0">
                 <a:solidFill>
-                  <a:srgbClr val="ECEBE4"/>
+                  <a:srgbClr val="1C1F1A"/>
                 </a:solidFill>
                 <a:latin typeface="Calibri"/>
               </a:rPr>
@@ -4992,7 +4992,7 @@
           </a:prstGeom>
           <a:ln w="12700">
             <a:solidFill>
-              <a:srgbClr val="A68A5B"/>
+              <a:srgbClr val="A08863"/>
             </a:solidFill>
           </a:ln>
         </p:spPr>
@@ -5036,7 +5036,7 @@
             <a:r>
               <a:rPr sz="1000" b="0" i="0">
                 <a:solidFill>
-                  <a:srgbClr val="A68A5B"/>
+                  <a:srgbClr val="A08863"/>
                 </a:solidFill>
                 <a:latin typeface="Courier New"/>
               </a:rPr>
@@ -5070,7 +5070,7 @@
             <a:r>
               <a:rPr sz="1400" b="0" i="0">
                 <a:solidFill>
-                  <a:srgbClr val="ECEBE4"/>
+                  <a:srgbClr val="1C1F1A"/>
                 </a:solidFill>
                 <a:latin typeface="Calibri"/>
               </a:rPr>
@@ -5108,7 +5108,7 @@
             <a:r>
               <a:rPr sz="1000" b="0" i="0">
                 <a:solidFill>
-                  <a:srgbClr val="A68A5B"/>
+                  <a:srgbClr val="A08863"/>
                 </a:solidFill>
                 <a:latin typeface="Courier New"/>
               </a:rPr>
@@ -5142,7 +5142,7 @@
             <a:r>
               <a:rPr sz="1400" b="0" i="0">
                 <a:solidFill>
-                  <a:srgbClr val="ECEBE4"/>
+                  <a:srgbClr val="1C1F1A"/>
                 </a:solidFill>
                 <a:latin typeface="Calibri"/>
               </a:rPr>
@@ -5180,7 +5180,7 @@
             <a:r>
               <a:rPr sz="900" b="0" i="0">
                 <a:solidFill>
-                  <a:srgbClr val="A7A398"/>
+                  <a:srgbClr val="C6C1B4"/>
                 </a:solidFill>
                 <a:latin typeface="Courier New"/>
               </a:rPr>

--- a/backend/tests/fixtures/lumen_justify_pitch_deck.pptx
+++ b/backend/tests/fixtures/lumen_justify_pitch_deck.pptx
@@ -3144,8 +3144,8 @@
         </p:nvSpPr>
         <p:spPr>
           <a:xfrm>
-            <a:off x="731520" y="548640"/>
-            <a:ext cx="10972800" cy="320040"/>
+            <a:off x="731520" y="1188720"/>
+            <a:ext cx="5486400" cy="320040"/>
           </a:xfrm>
           <a:prstGeom prst="rect">
             <a:avLst/>
@@ -3165,7 +3165,7 @@
                 </a:solidFill>
                 <a:latin typeface="Courier New"/>
               </a:rPr>
-              <a:t>Design Office — argumentaire client</a:t>
+              <a:t>Design Office — client argumentaire</a:t>
             </a:r>
           </a:p>
         </p:txBody>
@@ -3178,8 +3178,8 @@
         </p:nvSpPr>
         <p:spPr>
           <a:xfrm>
-            <a:off x="731520" y="1097280"/>
-            <a:ext cx="10972800" cy="2377440"/>
+            <a:off x="731520" y="1737360"/>
+            <a:ext cx="5486400" cy="2377440"/>
           </a:xfrm>
           <a:prstGeom prst="rect">
             <a:avLst/>
@@ -3193,7 +3193,7 @@
           <a:lstStyle/>
           <a:p>
             <a:r>
-              <a:rPr sz="5600" b="1" i="0">
+              <a:rPr sz="4800" b="1" i="0">
                 <a:solidFill>
                   <a:srgbClr val="1C1F1A"/>
                 </a:solidFill>
@@ -3213,7 +3213,7 @@
         </p:nvCxnSpPr>
         <p:spPr>
           <a:xfrm>
-            <a:off x="731520" y="3657600"/>
+            <a:off x="731520" y="4206240"/>
             <a:ext cx="3657600" cy="0"/>
           </a:xfrm>
           <a:prstGeom prst="line">
@@ -3248,8 +3248,8 @@
         </p:nvSpPr>
         <p:spPr>
           <a:xfrm>
-            <a:off x="731520" y="3840480"/>
-            <a:ext cx="10972800" cy="2194560"/>
+            <a:off x="731520" y="4389120"/>
+            <a:ext cx="5486400" cy="1828800"/>
           </a:xfrm>
           <a:prstGeom prst="rect">
             <a:avLst/>
@@ -3263,16 +3263,16 @@
           <a:lstStyle/>
           <a:p>
             <a:r>
-              <a:rPr sz="2000" b="0" i="0">
+              <a:rPr sz="1800" b="0" i="0">
                 <a:solidFill>
                   <a:srgbClr val="1C1F1A"/>
                 </a:solidFill>
                 <a:latin typeface="Calibri"/>
               </a:rPr>
-              <a:t>Parti : Atelier
-Postes : 130
-Flex ratio : 0.75
-Total programmé : ≈ 2080 m²</a:t>
+              <a:t>Parti: Atelier
+Desks: 130
+Flex ratio: 0.75
+Total programmed: ≈ 2080 m²</a:t>
             </a:r>
           </a:p>
         </p:txBody>
@@ -3285,7 +3285,7 @@
         </p:nvSpPr>
         <p:spPr>
           <a:xfrm>
-            <a:off x="731520" y="6217920"/>
+            <a:off x="731520" y="6309360"/>
             <a:ext cx="10972800" cy="365760"/>
           </a:xfrm>
           <a:prstGeom prst="rect">
@@ -3306,7 +3306,7 @@
                 </a:solidFill>
                 <a:latin typeface="Courier New"/>
               </a:rPr>
-              <a:t>2026-04-22 · Built with Opus 4.7 · MIT License</a:t>
+              <a:t>2026-04-23 · Built with Opus 4.7 · MIT License</a:t>
             </a:r>
           </a:p>
         </p:txBody>
@@ -3401,7 +3401,7 @@
                 </a:solidFill>
                 <a:latin typeface="Courier New"/>
               </a:rPr>
-              <a:t>01 · LE PARI</a:t>
+              <a:t>01 · THE BET</a:t>
             </a:r>
           </a:p>
         </p:txBody>
@@ -3435,7 +3435,7 @@
                 </a:solidFill>
                 <a:latin typeface="Calibri"/>
               </a:rPr>
-              <a:t>Pourquoi cette variante pour Lumen</a:t>
+              <a:t>Why this variant for Lumen</a:t>
             </a:r>
           </a:p>
         </p:txBody>
@@ -3599,7 +3599,7 @@
                 </a:solidFill>
                 <a:latin typeface="Courier New"/>
               </a:rPr>
-              <a:t>02 · PROGRAMME RETENU</a:t>
+              <a:t>02 · RETAINED PROGRAMME</a:t>
             </a:r>
           </a:p>
         </p:txBody>
@@ -4324,7 +4324,7 @@
                 </a:solidFill>
                 <a:latin typeface="Courier New"/>
               </a:rPr>
-              <a:t>TOTAL PROGRAMMÉ (M²)</a:t>
+              <a:t>TOTAL PROGRAMMED (M²)</a:t>
             </a:r>
           </a:p>
         </p:txBody>
@@ -4453,7 +4453,7 @@
                 </a:solidFill>
                 <a:latin typeface="Courier New"/>
               </a:rPr>
-              <a:t>03 · CE QUE DIT LA RECHERCHE</a:t>
+              <a:t>03 · WHAT THE RESEARCH SAYS</a:t>
             </a:r>
           </a:p>
         </p:txBody>
@@ -4692,7 +4692,7 @@
                 </a:solidFill>
                 <a:latin typeface="Courier New"/>
               </a:rPr>
-              <a:t>04 · CE QUE DIT LA RÉGLEMENTATION</a:t>
+              <a:t>04 · WHAT THE REGULATION SAYS</a:t>
             </a:r>
           </a:p>
         </p:txBody>
@@ -4937,7 +4937,7 @@
                 </a:solidFill>
                 <a:latin typeface="Courier New"/>
               </a:rPr>
-              <a:t>05 · PROCHAINES ÉTAPES &amp; KPIS</a:t>
+              <a:t>05 · NEXT STEPS &amp; KPIS</a:t>
             </a:r>
           </a:p>
         </p:txBody>
@@ -4971,7 +4971,7 @@
                 </a:solidFill>
                 <a:latin typeface="Calibri"/>
               </a:rPr>
-              <a:t>Ce qu'il faut pour démarrer</a:t>
+              <a:t>What it takes to start</a:t>
             </a:r>
           </a:p>
         </p:txBody>
@@ -5040,7 +5040,7 @@
                 </a:solidFill>
                 <a:latin typeface="Courier New"/>
               </a:rPr>
-              <a:t>RÉSULTATS ATTENDUS 6–12 MOIS</a:t>
+              <a:t>EXPECTED RESULTS 6–12 MONTHS</a:t>
             </a:r>
           </a:p>
         </p:txBody>
@@ -5112,7 +5112,7 @@
                 </a:solidFill>
                 <a:latin typeface="Courier New"/>
               </a:rPr>
-              <a:t>PROCHAINES ÉTAPES</a:t>
+              <a:t>NEXT STEPS</a:t>
             </a:r>
           </a:p>
         </p:txBody>
@@ -5184,7 +5184,7 @@
                 </a:solidFill>
                 <a:latin typeface="Courier New"/>
               </a:rPr>
-              <a:t>Projet : LUMEN-CAT-B-DEMO · Built with Opus 4.7</a:t>
+              <a:t>Project: LUMEN-CAT-B-DEMO · Built with Opus 4.7</a:t>
             </a:r>
           </a:p>
         </p:txBody>
